--- a/report/presentation.pptx
+++ b/report/presentation.pptx
@@ -795,7 +795,7 @@
           <a:lstStyle/>
           <a:p>
             <a:r>
-              <a:t>Le planificateur réserve les cases dans l'espace-temps : les robots ne se bloquent jamais entre eux. Trois niveaux : ce que voit PPO, la position de tous les humains, et le futur réel des humains. À compléter avec les chiffres de search (Lohann).</a:t>
+              <a:t>Le planificateur réserve les cases dans l'espace-temps : les robots ne se bloquent jamais entre eux, ses trajets sont les plus directs. Pourtant il livre 13,1 caisses contre 18,3 pour PPO, avec une forte variance : sur 11 à 14 labyrinthes sur 100 il livre moins de 5 caisses. Hypothèse : réserver un couloir d'une case condamne les autres à attendre. Savoir où sont les humains, ou même où ils iront, ne change rien de significatif (12,4 à 13,5, erreur-type 0,7) : l'écart avec PPO vient de ce qu'il a appris, pas de l'information. Search : chiffres à compléter (Lohann).</a:t>
             </a:r>
           </a:p>
         </p:txBody>
@@ -10563,7 +10563,7 @@
                 </a:solidFill>
                 <a:latin typeface="Calibri"/>
               </a:rPr>
-              <a:t>RÉSULTATS · PLANIFICATEUR</a:t>
+              <a:t>RÉSULTATS · PLANIFICATEUR, SCÉNARIO BIG</a:t>
             </a:r>
           </a:p>
         </p:txBody>
@@ -10602,14 +10602,38 @@
                 </a:solidFill>
                 <a:latin typeface="Calibri"/>
               </a:rPr>
-              <a:t>Ce que vaut l'information face à l'apprentissage</a:t>
-            </a:r>
-          </a:p>
-        </p:txBody>
-      </p:sp>
-      <p:sp>
-        <p:nvSpPr>
-          <p:cNvPr id="4" name="TextBox 3"/>
+              <a:t>Zéro collision ne veut pas dire plus de livraisons</a:t>
+            </a:r>
+          </a:p>
+        </p:txBody>
+      </p:sp>
+      <p:pic>
+        <p:nvPicPr>
+          <p:cNvPr id="4" name="Picture 3" descr="ladder.png"/>
+          <p:cNvPicPr>
+            <a:picLocks noChangeAspect="1"/>
+          </p:cNvPicPr>
+          <p:nvPr/>
+        </p:nvPicPr>
+        <p:blipFill>
+          <a:blip r:embed="rId3"/>
+          <a:stretch>
+            <a:fillRect/>
+          </a:stretch>
+        </p:blipFill>
+        <p:spPr>
+          <a:xfrm>
+            <a:off x="548640" y="1554480"/>
+            <a:ext cx="7315200" cy="3421626"/>
+          </a:xfrm>
+          <a:prstGeom prst="rect">
+            <a:avLst/>
+          </a:prstGeom>
+        </p:spPr>
+      </p:pic>
+      <p:sp>
+        <p:nvSpPr>
+          <p:cNvPr id="5" name="TextBox 4"/>
           <p:cNvSpPr txBox="1"/>
           <p:nvPr/>
         </p:nvSpPr>
@@ -10659,7 +10683,7 @@
                 </a:solidFill>
                 <a:latin typeface="Calibri"/>
               </a:rPr>
-              <a:t>obs : </a:t>
+              <a:t>0 blocage, </a:t>
             </a:r>
             <a:r>
               <a:rPr sz="1600" b="0">
@@ -10668,7 +10692,7 @@
                 </a:solidFill>
                 <a:latin typeface="Calibri"/>
               </a:rPr>
-              <a:t>ce que voit PPO</a:t>
+              <a:t>trajets les plus directs, mais 13,1 livraisons contre 18,3</a:t>
             </a:r>
           </a:p>
           <a:p>
@@ -10693,7 +10717,7 @@
                 </a:solidFill>
                 <a:latin typeface="Calibri"/>
               </a:rPr>
-              <a:t>state : </a:t>
+              <a:t>Voir les humains, </a:t>
             </a:r>
             <a:r>
               <a:rPr sz="1600" b="0">
@@ -10702,7 +10726,7 @@
                 </a:solidFill>
                 <a:latin typeface="Calibri"/>
               </a:rPr>
-              <a:t>position de tous les humains</a:t>
+              <a:t>même leur futur : 12,4 à 13,5, dans le bruit</a:t>
             </a:r>
           </a:p>
           <a:p>
@@ -10727,7 +10751,7 @@
                 </a:solidFill>
                 <a:latin typeface="Calibri"/>
               </a:rPr>
-              <a:t>future : </a:t>
+              <a:t>PPO a appris </a:t>
             </a:r>
             <a:r>
               <a:rPr sz="1600" b="0">
@@ -10736,7 +10760,7 @@
                 </a:solidFill>
                 <a:latin typeface="Calibri"/>
               </a:rPr>
-              <a:t>où les humains vont aller</a:t>
+              <a:t>à partager les couloirs</a:t>
             </a:r>
           </a:p>
           <a:p>
@@ -10770,14 +10794,14 @@
                 </a:solidFill>
                 <a:latin typeface="Calibri"/>
               </a:rPr>
-              <a:t>PPO + simulations à 6 pas, à compléter (Lohann)</a:t>
-            </a:r>
-          </a:p>
-        </p:txBody>
-      </p:sp>
-      <p:sp>
-        <p:nvSpPr>
-          <p:cNvPr id="5" name="TextBox 4"/>
+              <a:t>à compléter (Lohann)</a:t>
+            </a:r>
+          </a:p>
+        </p:txBody>
+      </p:sp>
+      <p:sp>
+        <p:nvSpPr>
+          <p:cNvPr id="6" name="TextBox 5"/>
           <p:cNvSpPr txBox="1"/>
           <p:nvPr/>
         </p:nvSpPr>
